--- a/exports/06_twocolumn_max.pptx
+++ b/exports/06_twocolumn_max.pptx
@@ -502,7 +502,8 @@
           <a:p>
             <a:r>
               <a:rPr lang="en-US" dirty="0"/>
-              <a:t>Compare infrastructure agility against control requirements.</a:t>
+              <a:t>Compare infrastructure agility against control requirements.
+Source: 06_twocolumn_max.pdf</a:t>
             </a:r>
             <a:endParaRPr lang="en-US" dirty="0"/>
           </a:p>
